--- a/lectures/Lecture 5.1 - JavaScript Intro.pptx
+++ b/lectures/Lecture 5.1 - JavaScript Intro.pptx
@@ -2382,7 +2382,7 @@
             </a:pPr>
             <a:r>
               <a:rPr lang="en-US"/>
-              <a:t>Arrays are JS's only sequence type - no tuples, no linked lists, no separate typed-array thing for normal use. What matters here is the second half: the running todos dataset. Every subsequent slide uses this same shape. Array of objects with known keys is the same shape students will see coming back from their FastAPI endpoints in 5.2 and 6.1, so getting comfortable here pays off directly.</a:t>
+              <a:t>Arrays are JS's only sequence type - no tuples, no linked lists, no separate typed-array thing for normal use. What matters here is the second half: the running todos dataset. Every subsequent slide uses this same shape. An array of objects with known keys is the same shape they'll see coming back from their own FastAPI endpoints in 5.2 and 6.1, so time spent getting comfortable here comes straight back to them.</a:t>
             </a:r>
             <a:endParaRPr/>
           </a:p>
@@ -2684,7 +2684,7 @@
             </a:pPr>
             <a:r>
               <a:rPr lang="en-US"/>
-              <a:t>Arrays are JS's only sequence type - no tuples, no linked lists, no separate typed-array thing for normal use. What matters here is the second half: the running todos dataset. Every subsequent slide uses this same shape. Array of objects with known keys is the same shape students will see coming back from their FastAPI endpoints in 5.2 and 6.1, so getting comfortable here pays off directly.</a:t>
+              <a:t>Arrays are JS's only sequence type - no tuples, no linked lists, no separate typed-array thing for normal use. What matters here is the second half: the running todos dataset. Every subsequent slide uses this same shape. An array of objects with known keys is the same shape they'll see coming back from their own FastAPI endpoints in 5.2 and 6.1, so time spent getting comfortable here comes straight back to them.</a:t>
             </a:r>
             <a:endParaRPr/>
           </a:p>
@@ -2986,7 +2986,7 @@
             </a:pPr>
             <a:r>
               <a:rPr lang="en-US"/>
-              <a:t>Idiomatic modern JS almost never uses a for loop to transform data - it uses array methods that take a function. Point out the chaining explicitly: filter returns an array, so you can call .map() on it directly. That's the functional style that defines modern JS. The reduce example is worth walking through slowly because reduce is the one students struggle with the first time. Walking the accumulator through two iterations by hand clears it up fast. Tee up that React leans on .map() especially hard for list rendering - it's how you turn a list of data into a list of UI elements.</a:t>
+              <a:t>Idiomatic modern JS almost never uses a for loop to transform data - it uses array methods that take a function. Point out the chaining explicitly - filter returns an array, so you can call .map() straight off it, and that chained functional style is most of what modern JS looks like in practice. The reduce example is worth walking through slowly because reduce is the one students struggle with the first time. Walking the accumulator through two iterations by hand clears it up fast. Tee up that React leans on .map() especially hard for list rendering - it's how you turn a list of data into a list of UI elements.</a:t>
             </a:r>
             <a:endParaRPr/>
           </a:p>
@@ -3137,7 +3137,7 @@
             </a:pPr>
             <a:r>
               <a:rPr lang="en-US"/>
-              <a:t>Using `==` is how you end up with bugs that look impossible to reproduce. `===` compares type AND value with no surprises - every modern codebase, every linter, every style guide agrees. ALWAYS ===. The edge cases at the bottom are the scar-tissue callout: the language literally cannot remove `==` without breaking the web, so the community collectively agrees not to type it. That's a normal pattern in JS-world and it explains a LOT of the style rules students will see in real codebases.</a:t>
+              <a:t>Using `==` is how you end up with bugs that look impossible to reproduce. `===` compares type AND value with no surprises left over, and there's no real disagreement about this anywhere - codebases, linters, style guides all land in the same place. ALWAYS ===. The edge cases at the bottom are the scar-tissue callout: the language literally cannot remove `==` without breaking the web, so the community collectively agrees not to type it. That's a normal pattern in JS-world and it explains a LOT of the style rules students will see in real codebases.</a:t>
             </a:r>
             <a:endParaRPr/>
           </a:p>
@@ -3288,7 +3288,7 @@
             </a:pPr>
             <a:r>
               <a:rPr lang="en-US"/>
-              <a:t>Using `==` is how you end up with bugs that look impossible to reproduce. `===` compares type AND value with no surprises - every modern codebase, every linter, every style guide agrees. ALWAYS ===. The edge cases at the bottom are the scar-tissue callout: the language literally cannot remove `==` without breaking the web, so the community collectively agrees not to type it. That's a normal pattern in JS-world and it explains a LOT of the style rules students will see in real codebases.</a:t>
+              <a:t>Using `==` is how you end up with bugs that look impossible to reproduce. `===` compares type AND value with no surprises left over, and there's no real disagreement about this anywhere - codebases, linters, style guides all land in the same place. ALWAYS ===. The edge cases at the bottom are the scar-tissue callout: the language literally cannot remove `==` without breaking the web, so the community collectively agrees not to type it. That's a normal pattern in JS-world and it explains a LOT of the style rules students will see in real codebases.</a:t>
             </a:r>
             <a:endParaRPr/>
           </a:p>
@@ -3439,7 +3439,7 @@
             </a:pPr>
             <a:r>
               <a:rPr lang="en-US"/>
-              <a:t>Using `==` is how you end up with bugs that look impossible to reproduce. `===` compares type AND value with no surprises - every modern codebase, every linter, every style guide agrees. ALWAYS ===. The edge cases at the bottom are the scar-tissue callout: the language literally cannot remove `==` without breaking the web, so the community collectively agrees not to type it. That's a normal pattern in JS-world and it explains a LOT of the style rules students will see in real codebases.</a:t>
+              <a:t>Using `==` is how you end up with bugs that look impossible to reproduce. `===` compares type AND value with no surprises left over, and there's no real disagreement about this anywhere - codebases, linters, style guides all land in the same place. ALWAYS ===. The edge cases at the bottom are the scar-tissue callout: the language literally cannot remove `==` without breaking the web, so the community collectively agrees not to type it. That's a normal pattern in JS-world and it explains a LOT of the style rules students will see in real codebases.</a:t>
             </a:r>
             <a:endParaRPr/>
           </a:p>
@@ -3590,7 +3590,7 @@
             </a:pPr>
             <a:r>
               <a:rPr lang="en-US"/>
-              <a:t>Three things the browser gives JS that Python never had: types (via TypeScript), a document to mutate (the DOM), and events to react to. We get the first two halves today. The third gift - talking to a server - gets its own lecture next class.</a:t>
+              <a:t>The browser hands JS a few things Python never had - types by way of TypeScript, a document you can reach in and mutate, and events to react to. We get through those today. Talking to a server is the one that gets its own lecture next class.</a:t>
             </a:r>
             <a:endParaRPr/>
           </a:p>
@@ -3741,7 +3741,7 @@
             </a:pPr>
             <a:r>
               <a:rPr lang="en-US"/>
-              <a:t>TypeScript is a COMPILE-TIME layer - the browser still ends up running plain JavaScript, and TypeScript's whole job is to catch your mistakes before you ship. Same spirit as pytest, which is to say fail early rather than late. In real projects you use a bundler (Vite, esbuild) that handles compilation + bundling + hot reloading in one tool - you'll see that in week 6 when we set up React.</a:t>
+              <a:t>TypeScript is a COMPILE-TIME layer, so the browser still ends up running plain JavaScript, and all TypeScript is doing is catching your mistakes before you ship them. Same spirit as pytest - find out early instead of late. In real projects you use a bundler (Vite, esbuild) that handles compilation + bundling + hot reloading in one tool - you'll see that in week 6 when we set up React.</a:t>
             </a:r>
             <a:endParaRPr/>
           </a:p>
@@ -3892,7 +3892,7 @@
             </a:pPr>
             <a:r>
               <a:rPr lang="en-US"/>
-              <a:t>TypeScript is a COMPILE-TIME layer - the browser still ends up running plain JavaScript, and TypeScript's whole job is to catch your mistakes before you ship. Same spirit as pytest, which is to say fail early rather than late. In real projects you use a bundler (Vite, esbuild) that handles compilation + bundling + hot reloading in one tool - you'll see that in week 6 when we set up React.</a:t>
+              <a:t>TypeScript is a COMPILE-TIME layer, so the browser still ends up running plain JavaScript, and all TypeScript is doing is catching your mistakes before you ship them. Same spirit as pytest - find out early instead of late. In real projects you use a bundler (Vite, esbuild) that handles compilation + bundling + hot reloading in one tool - you'll see that in week 6 when we set up React.</a:t>
             </a:r>
             <a:endParaRPr/>
           </a:p>
@@ -4043,7 +4043,7 @@
             </a:pPr>
             <a:r>
               <a:rPr lang="en-US"/>
-              <a:t>TypeScript is a COMPILE-TIME layer - the browser still ends up running plain JavaScript, and TypeScript's whole job is to catch your mistakes before you ship. Same spirit as pytest, which is to say fail early rather than late. In real projects you use a bundler (Vite, esbuild) that handles compilation + bundling + hot reloading in one tool - you'll see that in week 6 when we set up React.</a:t>
+              <a:t>TypeScript is a COMPILE-TIME layer, so the browser still ends up running plain JavaScript, and all TypeScript is doing is catching your mistakes before you ship them. Same spirit as pytest - find out early instead of late. In real projects you use a bundler (Vite, esbuild) that handles compilation + bundling + hot reloading in one tool - you'll see that in week 6 when we set up React.</a:t>
             </a:r>
             <a:endParaRPr/>
           </a:p>
@@ -4647,7 +4647,7 @@
             </a:pPr>
             <a:r>
               <a:rPr lang="en-US"/>
-              <a:t>Interfaces are TypeScript's equivalent of Pydantic models from 3.2 - they describe the shape an object should have. The optional `?` on priority is the same idea as `Optional[int]` in Python. When tsc sees a shape mismatch it flags it before the code ever runs, which is the whole point.</a:t>
+              <a:t>Interfaces are TypeScript's equivalent of Pydantic models from 3.2 - they describe the shape an object should have. The optional `?` on priority is the same idea as `Optional[int]` in Python. When tsc sees a shape mismatch it flags it before the code ever runs, which is really the entire reason to bother with any of this.</a:t>
             </a:r>
             <a:endParaRPr/>
           </a:p>
@@ -4798,7 +4798,7 @@
             </a:pPr>
             <a:r>
               <a:rPr lang="en-US"/>
-              <a:t>Students should see the HTML on the left and the corresponding object tree on the right and understand that JS is mutating the tree, not re-parsing the HTML text. That mental shift is what makes the rest of the section land.</a:t>
+              <a:t>They should look at the HTML on the left and the object tree on the right and come away understanding that JS is reaching into that tree and changing it, rather than re-parsing the HTML text every time. Nothing else in the section lands until that shift happens.</a:t>
             </a:r>
             <a:endParaRPr/>
           </a:p>
@@ -5540,7 +5540,7 @@
             </a:pPr>
             <a:r>
               <a:rPr lang="en-US"/>
-              <a:t>The page for the rest of the DOM section. One input, one button, one ul with two initial items. The &lt;link&gt; tag in the head pulls in app.css (next slide), the &lt;script&gt; tag at the bottom loads our compiled TypeScript. Three files, one for each language. Keep this slide up on the projector as you walk through the next few - students need to see what the JS is operating on.</a:t>
+              <a:t>This is the page for the rest of the DOM section - one input, one button, one ul with two items already in it. The &lt;link&gt; tag up in the head pulls in app.css from the next slide, and the &lt;script&gt; tag at the bottom loads our compiled TypeScript, so it's three files, one per language. Keep this slide up on the projector as you walk through the next few - students need to see what the JS is operating on.</a:t>
             </a:r>
             <a:endParaRPr/>
           </a:p>
@@ -5691,7 +5691,7 @@
             </a:pPr>
             <a:r>
               <a:rPr lang="en-US"/>
-              <a:t>Tiny stylesheet, four rules. The first three are cosmetic - they keep the page from looking like 1996 so students aren't distracted by raw browser defaults. The last one is the rule that matters: anything with class="done" gets line-throughed. The closing exercise will toggle that class on and off in JS, and the visible behavior comes from this CSS rule. If you want to make the connection extra concrete, open devtools on the live page and edit a class in the elements panel - the line-through appears and disappears as you toggle.</a:t>
+              <a:t>Tiny stylesheet, four rules. The first three are cosmetic - they keep the page from looking like 1996 so students aren't distracted by raw browser defaults. The last rule is the one doing real work - anything with class="done" gets line-throughed. The closing exercise will toggle that class on and off in JS, and the visible behavior comes from this CSS rule. If you want to make the connection extra concrete, open devtools on the live page and edit a class in the elements panel - the line-through appears and disappears as you toggle.</a:t>
             </a:r>
             <a:endParaRPr/>
           </a:p>
@@ -6783,7 +6783,7 @@
             </a:pPr>
             <a:r>
               <a:rPr lang="en-US"/>
-              <a:t>Students coming from Python are used to linear control flow, and event-driven code is the opposite of that - your code runs in response to stimuli, your job is to register the right responses ahead of time. Pause on the 'and then nothing' line, that surprises students every time.</a:t>
+              <a:t>Students coming from Python are used to control flow running top to bottom, and event-driven code doesn't work like that at all - your code runs when something pokes it, so the job becomes registering the right responses ahead of time and then getting out of the way. Pause on the 'and then nothing' line, that surprises students every time.</a:t>
             </a:r>
             <a:endParaRPr/>
           </a:p>
@@ -6980,7 +6980,7 @@
             </a:pPr>
             <a:r>
               <a:rPr lang="en-US"/>
-              <a:t>Students coming from Python are used to linear control flow, and event-driven code is the opposite of that - your code runs in response to stimuli, your job is to register the right responses ahead of time. Pause on the 'and then nothing' line, that surprises students every time.</a:t>
+              <a:t>Students coming from Python are used to control flow running top to bottom, and event-driven code doesn't work like that at all - your code runs when something pokes it, so the job becomes registering the right responses ahead of time and then getting out of the way. Pause on the 'and then nothing' line, that surprises students every time.</a:t>
             </a:r>
             <a:endParaRPr/>
           </a:p>
@@ -7177,7 +7177,7 @@
             </a:pPr>
             <a:r>
               <a:rPr lang="en-US"/>
-              <a:t>Students coming from Python are used to linear control flow, and event-driven code is the opposite of that - your code runs in response to stimuli, your job is to register the right responses ahead of time. Pause on the 'and then nothing' line, that surprises students every time.</a:t>
+              <a:t>Students coming from Python are used to control flow running top to bottom, and event-driven code doesn't work like that at all - your code runs when something pokes it, so the job becomes registering the right responses ahead of time and then getting out of the way. Pause on the 'and then nothing' line, that surprises students every time.</a:t>
             </a:r>
             <a:endParaRPr/>
           </a:p>

--- a/lectures/Lecture 5.1 - JavaScript Intro.pptx
+++ b/lectures/Lecture 5.1 - JavaScript Intro.pptx
@@ -981,20 +981,9 @@
           </a:bodyPr>
           <a:lstStyle/>
           <a:p>
-            <a:pPr indent="0" lvl="0" marL="0" rtl="0" algn="l">
-              <a:spcBef>
-                <a:spcPts val="0"/>
-              </a:spcBef>
-              <a:spcAft>
-                <a:spcPts val="0"/>
-              </a:spcAft>
-              <a:buNone/>
-            </a:pPr>
-            <a:r>
-              <a:rPr lang="en-US"/>
-              <a:t>Give them the full four minutes, don't cut it short. Cold-call three pairs afterward and put their answers on the board. The next slide validates each one against what Eich actually did, and it lands way better when students see their own instincts lining up. Things they should surface: (a) DYNAMIC TYPING - non-programmers can't be expected to     annotate types, no time to build a type system anyway. (b) FORGIVING ERRORS - a syntax error can't kill the whole     page, default to recovering and limping on. (c) EVENT-DRIVEN - the browser is reacting to user input,     so the language needs a way to say 'run this code when     the user clicks that button.' (d) INTERPRETED, not compiled - no build step, save the     HTML and hit reload. (e) SIMPLE OBJECT MODEL - no class hierarchies, just bags     of properties. Keep their answers on the board through the next section.</a:t>
-            </a:r>
-            <a:endParaRPr/>
+            <a:r>
+              <a:t>4 min full. Cold-call three pairs, board answers. Expect: dynamic typing, forgiving errors, event-driven, interpreted.</a:t>
+            </a:r>
           </a:p>
         </p:txBody>
       </p:sp>
@@ -1132,20 +1121,9 @@
           </a:bodyPr>
           <a:lstStyle/>
           <a:p>
-            <a:pPr indent="0" lvl="0" marL="0" rtl="0" algn="l">
-              <a:spcBef>
-                <a:spcPts val="0"/>
-              </a:spcBef>
-              <a:spcAft>
-                <a:spcPts val="0"/>
-              </a:spcAft>
-              <a:buNone/>
-            </a:pPr>
-            <a:r>
-              <a:rPr lang="en-US"/>
-              <a:t>Walk through each decision and point back at the students' answers on the board. Eich gets a lot of grief on the internet and most of it is unfair once you see the box he was working in. The bottom half is permission-to-not-memorize: students don't need every dark corner of JS, they need to read it fluently and write the modern idioms. The quirks show up often enough that knowing WHY they're there is way more useful than memorizing a rules table.</a:t>
-            </a:r>
-            <a:endParaRPr/>
+            <a:r>
+              <a:t>Check each decision against the board answers.</a:t>
+            </a:r>
           </a:p>
         </p:txBody>
       </p:sp>
@@ -1283,20 +1261,9 @@
           </a:bodyPr>
           <a:lstStyle/>
           <a:p>
-            <a:pPr indent="0" lvl="0" marL="0" rtl="0" algn="l">
-              <a:spcBef>
-                <a:spcPts val="0"/>
-              </a:spcBef>
-              <a:spcAft>
-                <a:spcPts val="0"/>
-              </a:spcAft>
-              <a:buNone/>
-            </a:pPr>
-            <a:r>
-              <a:rPr lang="en-US"/>
-              <a:t>Walk through each decision and point back at the students' answers on the board. Eich gets a lot of grief on the internet and most of it is unfair once you see the box he was working in. The bottom half is permission-to-not-memorize: students don't need every dark corner of JS, they need to read it fluently and write the modern idioms. The quirks show up often enough that knowing WHY they're there is way more useful than memorizing a rules table.</a:t>
-            </a:r>
-            <a:endParaRPr/>
+            <a:r>
+              <a:t>Check each decision against the board answers.</a:t>
+            </a:r>
           </a:p>
         </p:txBody>
       </p:sp>
@@ -1434,51 +1401,9 @@
           </a:bodyPr>
           <a:lstStyle/>
           <a:p>
-            <a:pPr indent="0" lvl="0" marL="0" rtl="0" algn="l">
-              <a:spcBef>
-                <a:spcPts val="0"/>
-              </a:spcBef>
-              <a:spcAft>
-                <a:spcPts val="0"/>
-              </a:spcAft>
-              <a:buNone/>
-            </a:pPr>
-            <a:r>
-              <a:rPr lang="en-US"/>
-              <a:t>Default to `const`, reach for `let` when you actually need to reassign, never use `var`. The const-on-object subtlety is worth pausing on - it catches every JS beginner at least once. const means the binding is fixed, not the value inside. If a coding agent sneaks a `var` into your code, call it out, there's no real reason for it in modern JS.</a:t>
-            </a:r>
-            <a:endParaRPr/>
-          </a:p>
-          <a:p>
-            <a:pPr indent="0" lvl="0" marL="0" rtl="0" algn="l">
-              <a:spcBef>
-                <a:spcPts val="0"/>
-              </a:spcBef>
-              <a:spcAft>
-                <a:spcPts val="0"/>
-              </a:spcAft>
-              <a:buNone/>
-            </a:pPr>
-            <a:r>
-              <a:t/>
-            </a:r>
-            <a:endParaRPr/>
-          </a:p>
-          <a:p>
-            <a:pPr indent="0" lvl="0" marL="0" rtl="0" algn="l">
-              <a:spcBef>
-                <a:spcPts val="0"/>
-              </a:spcBef>
-              <a:spcAft>
-                <a:spcPts val="0"/>
-              </a:spcAft>
-              <a:buNone/>
-            </a:pPr>
-            <a:r>
-              <a:rPr lang="en-US"/>
-              <a:t>ESLint with no-var from eslint:recommended will ban it.</a:t>
-            </a:r>
-            <a:endParaRPr/>
+            <a:r>
+              <a:t>Default const, let only to reassign. ESLint no-var in eslint:recommended bans `var`.</a:t>
+            </a:r>
           </a:p>
         </p:txBody>
       </p:sp>
@@ -1616,20 +1541,9 @@
           </a:bodyPr>
           <a:lstStyle/>
           <a:p>
-            <a:pPr indent="0" lvl="0" marL="0" rtl="0" algn="l">
-              <a:spcBef>
-                <a:spcPts val="0"/>
-              </a:spcBef>
-              <a:spcAft>
-                <a:spcPts val="0"/>
-              </a:spcAft>
-              <a:buNone/>
-            </a:pPr>
-            <a:r>
-              <a:rPr lang="en-US"/>
-              <a:t>Numbers are ONE type, no separate int vs float, which is convenient until you hit floating-point precision later. The two-nothings bit is the scar-tissue moment in action. `null` is deliberate, `undefined` is accidental, and in practice you treat them the same and check with `== null` (one of the few legit uses of `==`). Or use `??` / `?.` for the modern way.</a:t>
-            </a:r>
-            <a:endParaRPr/>
+            <a:r>
+              <a:t>Treat null/undefined the same in practice: check `== null`, or use `??` / `?.`.</a:t>
+            </a:r>
           </a:p>
         </p:txBody>
       </p:sp>
@@ -1766,22 +1680,7 @@
             <a:noAutofit/>
           </a:bodyPr>
           <a:lstStyle/>
-          <a:p>
-            <a:pPr indent="0" lvl="0" marL="0" rtl="0" algn="l">
-              <a:spcBef>
-                <a:spcPts val="0"/>
-              </a:spcBef>
-              <a:spcAft>
-                <a:spcPts val="0"/>
-              </a:spcAft>
-              <a:buNone/>
-            </a:pPr>
-            <a:r>
-              <a:rPr lang="en-US"/>
-              <a:t>Template literals are the modern way to build strings in JS, same idea as Python's f-strings. `${expr}` interpolates and you get multi-line strings for free without \n escapes. If your code does string concatenation with `+`, you should probably reach for backticks instead.</a:t>
-            </a:r>
-            <a:endParaRPr/>
-          </a:p>
+          <a:p/>
         </p:txBody>
       </p:sp>
       <p:sp>
@@ -1918,20 +1817,9 @@
           </a:bodyPr>
           <a:lstStyle/>
           <a:p>
-            <a:pPr indent="0" lvl="0" marL="0" rtl="0" algn="l">
-              <a:spcBef>
-                <a:spcPts val="0"/>
-              </a:spcBef>
-              <a:spcAft>
-                <a:spcPts val="0"/>
-              </a:spcAft>
-              <a:buNone/>
-            </a:pPr>
-            <a:r>
-              <a:rPr lang="en-US"/>
-              <a:t>Dot-access for fixed names, bracket-access for dynamic keys you have in a variable. The numeric-keys-coerce-to-strings example is a scar-tissue callout - it bites people coming from languages with proper dict types. Not a gotcha you hit often, but worth flagging so students aren't confused the one time it happens.</a:t>
-            </a:r>
-            <a:endParaRPr/>
+            <a:r>
+              <a:t>Dot for fixed names, bracket for keys held in a variable.</a:t>
+            </a:r>
           </a:p>
         </p:txBody>
       </p:sp>
@@ -2069,20 +1957,9 @@
           </a:bodyPr>
           <a:lstStyle/>
           <a:p>
-            <a:pPr indent="0" lvl="0" marL="0" rtl="0" algn="l">
-              <a:spcBef>
-                <a:spcPts val="0"/>
-              </a:spcBef>
-              <a:spcAft>
-                <a:spcPts val="0"/>
-              </a:spcAft>
-              <a:buNone/>
-            </a:pPr>
-            <a:r>
-              <a:rPr lang="en-US"/>
-              <a:t>Dot-access for fixed names, bracket-access for dynamic keys you have in a variable. The numeric-keys-coerce-to-strings example is a scar-tissue callout - it bites people coming from languages with proper dict types. Not a gotcha you hit often, but worth flagging so students aren't confused the one time it happens.</a:t>
-            </a:r>
-            <a:endParaRPr/>
+            <a:r>
+              <a:t>Dot for fixed names, bracket for keys held in a variable.</a:t>
+            </a:r>
           </a:p>
         </p:txBody>
       </p:sp>
@@ -2220,20 +2097,9 @@
           </a:bodyPr>
           <a:lstStyle/>
           <a:p>
-            <a:pPr indent="0" lvl="0" marL="0" rtl="0" algn="l">
-              <a:spcBef>
-                <a:spcPts val="0"/>
-              </a:spcBef>
-              <a:spcAft>
-                <a:spcPts val="0"/>
-              </a:spcAft>
-              <a:buNone/>
-            </a:pPr>
-            <a:r>
-              <a:rPr lang="en-US"/>
-              <a:t>Dot-access for fixed names, bracket-access for dynamic keys you have in a variable. The numeric-keys-coerce-to-strings example is a scar-tissue callout - it bites people coming from languages with proper dict types. Not a gotcha you hit often, but worth flagging so students aren't confused the one time it happens.</a:t>
-            </a:r>
-            <a:endParaRPr/>
+            <a:r>
+              <a:t>Dot for fixed names, bracket for keys held in a variable.</a:t>
+            </a:r>
           </a:p>
         </p:txBody>
       </p:sp>
@@ -2371,20 +2237,9 @@
           </a:bodyPr>
           <a:lstStyle/>
           <a:p>
-            <a:pPr indent="0" lvl="0" marL="0" rtl="0" algn="l">
-              <a:spcBef>
-                <a:spcPts val="0"/>
-              </a:spcBef>
-              <a:spcAft>
-                <a:spcPts val="0"/>
-              </a:spcAft>
-              <a:buNone/>
-            </a:pPr>
-            <a:r>
-              <a:rPr lang="en-US"/>
-              <a:t>Arrays are JS's only sequence type - no tuples, no linked lists, no separate typed-array thing for normal use. What matters here is the second half: the running todos dataset. Every subsequent slide uses this same shape. An array of objects with known keys is the same shape they'll see coming back from their own FastAPI endpoints in 5.2 and 6.1, so time spent getting comfortable here comes straight back to them.</a:t>
-            </a:r>
-            <a:endParaRPr/>
+            <a:r>
+              <a:t>Only sequence type, no tuples. Same shape their FastAPI endpoints return in 5.2 and 6.1.</a:t>
+            </a:r>
           </a:p>
         </p:txBody>
       </p:sp>
@@ -2522,20 +2377,9 @@
           </a:bodyPr>
           <a:lstStyle/>
           <a:p>
-            <a:pPr indent="0" lvl="0" marL="0" rtl="0" algn="l">
-              <a:spcBef>
-                <a:spcPts val="0"/>
-              </a:spcBef>
-              <a:spcAft>
-                <a:spcPts val="0"/>
-              </a:spcAft>
-              <a:buNone/>
-            </a:pPr>
-            <a:r>
-              <a:rPr lang="en-US"/>
-              <a:t>Set the stakes early. JS is the only programming language that ships in every browser, and that 97% number is worth leaning on - it's the grounding stat for why we're spending a whole lecture on this. Then immediately pivot to the ten-days story...every weird thing they're about to see should make them think 'ten days' and click into place. Also worth saying out loud: JavaScript and Java are unrelated. At least one student will ask about that later if I skip saying it.</a:t>
-            </a:r>
-            <a:endParaRPr/>
+            <a:r>
+              <a:t>Say it: JavaScript and Java are unrelated.</a:t>
+            </a:r>
           </a:p>
         </p:txBody>
       </p:sp>
@@ -2673,20 +2517,9 @@
           </a:bodyPr>
           <a:lstStyle/>
           <a:p>
-            <a:pPr indent="0" lvl="0" marL="0" rtl="0" algn="l">
-              <a:spcBef>
-                <a:spcPts val="0"/>
-              </a:spcBef>
-              <a:spcAft>
-                <a:spcPts val="0"/>
-              </a:spcAft>
-              <a:buNone/>
-            </a:pPr>
-            <a:r>
-              <a:rPr lang="en-US"/>
-              <a:t>Arrays are JS's only sequence type - no tuples, no linked lists, no separate typed-array thing for normal use. What matters here is the second half: the running todos dataset. Every subsequent slide uses this same shape. An array of objects with known keys is the same shape they'll see coming back from their own FastAPI endpoints in 5.2 and 6.1, so time spent getting comfortable here comes straight back to them.</a:t>
-            </a:r>
-            <a:endParaRPr/>
+            <a:r>
+              <a:t>Only sequence type, no tuples. Same shape their FastAPI endpoints return in 5.2 and 6.1.</a:t>
+            </a:r>
           </a:p>
         </p:txBody>
       </p:sp>
@@ -2824,20 +2657,9 @@
           </a:bodyPr>
           <a:lstStyle/>
           <a:p>
-            <a:pPr indent="0" lvl="0" marL="0" rtl="0" algn="l">
-              <a:spcBef>
-                <a:spcPts val="0"/>
-              </a:spcBef>
-              <a:spcAft>
-                <a:spcPts val="0"/>
-              </a:spcAft>
-              <a:buNone/>
-            </a:pPr>
-            <a:r>
-              <a:rPr lang="en-US"/>
-              <a:t>Both syntaxes are everywhere in real codebases. Arrows are the modern default for short callbacks, and one-expression arrows get an implicit return for free. The describe example uses the ternary operator (same idea as Python's conditional expression). The last comment is the bridge into the next slide - functions are values, which is why array methods take functions as arguments. We come back to first-class functions as a topic in 10.1.</a:t>
-            </a:r>
-            <a:endParaRPr/>
+            <a:r>
+              <a:t>Ternary = Python conditional expression. First-class functions return as a topic in 10.1.</a:t>
+            </a:r>
           </a:p>
         </p:txBody>
       </p:sp>
@@ -2975,20 +2797,9 @@
           </a:bodyPr>
           <a:lstStyle/>
           <a:p>
-            <a:pPr indent="0" lvl="0" marL="0" rtl="0" algn="l">
-              <a:spcBef>
-                <a:spcPts val="0"/>
-              </a:spcBef>
-              <a:spcAft>
-                <a:spcPts val="0"/>
-              </a:spcAft>
-              <a:buNone/>
-            </a:pPr>
-            <a:r>
-              <a:rPr lang="en-US"/>
-              <a:t>Idiomatic modern JS almost never uses a for loop to transform data - it uses array methods that take a function. Point out the chaining explicitly - filter returns an array, so you can call .map() straight off it, and that chained functional style is most of what modern JS looks like in practice. The reduce example is worth walking through slowly because reduce is the one students struggle with the first time. Walking the accumulator through two iterations by hand clears it up fast. Tee up that React leans on .map() especially hard for list rendering - it's how you turn a list of data into a list of UI elements.</a:t>
-            </a:r>
-            <a:endParaRPr/>
+            <a:r>
+              <a:t>Walk the reduce accumulator through two iterations by hand. React uses .map() for list rendering.</a:t>
+            </a:r>
           </a:p>
         </p:txBody>
       </p:sp>
@@ -3126,20 +2937,9 @@
           </a:bodyPr>
           <a:lstStyle/>
           <a:p>
-            <a:pPr indent="0" lvl="0" marL="0" rtl="0" algn="l">
-              <a:spcBef>
-                <a:spcPts val="0"/>
-              </a:spcBef>
-              <a:spcAft>
-                <a:spcPts val="0"/>
-              </a:spcAft>
-              <a:buNone/>
-            </a:pPr>
-            <a:r>
-              <a:rPr lang="en-US"/>
-              <a:t>Using `==` is how you end up with bugs that look impossible to reproduce. `===` compares type AND value with no surprises left over, and there's no real disagreement about this anywhere - codebases, linters, style guides all land in the same place. ALWAYS ===. The edge cases at the bottom are the scar-tissue callout: the language literally cannot remove `==` without breaking the web, so the community collectively agrees not to type it. That's a normal pattern in JS-world and it explains a LOT of the style rules students will see in real codebases.</a:t>
-            </a:r>
-            <a:endParaRPr/>
+            <a:r>
+              <a:t>`==` can't be removed without breaking the web, so nobody types it. Linters enforce `===`.</a:t>
+            </a:r>
           </a:p>
         </p:txBody>
       </p:sp>
@@ -3277,20 +3077,9 @@
           </a:bodyPr>
           <a:lstStyle/>
           <a:p>
-            <a:pPr indent="0" lvl="0" marL="0" rtl="0" algn="l">
-              <a:spcBef>
-                <a:spcPts val="0"/>
-              </a:spcBef>
-              <a:spcAft>
-                <a:spcPts val="0"/>
-              </a:spcAft>
-              <a:buNone/>
-            </a:pPr>
-            <a:r>
-              <a:rPr lang="en-US"/>
-              <a:t>Using `==` is how you end up with bugs that look impossible to reproduce. `===` compares type AND value with no surprises left over, and there's no real disagreement about this anywhere - codebases, linters, style guides all land in the same place. ALWAYS ===. The edge cases at the bottom are the scar-tissue callout: the language literally cannot remove `==` without breaking the web, so the community collectively agrees not to type it. That's a normal pattern in JS-world and it explains a LOT of the style rules students will see in real codebases.</a:t>
-            </a:r>
-            <a:endParaRPr/>
+            <a:r>
+              <a:t>`==` can't be removed without breaking the web, so nobody types it. Linters enforce `===`.</a:t>
+            </a:r>
           </a:p>
         </p:txBody>
       </p:sp>
@@ -3428,20 +3217,9 @@
           </a:bodyPr>
           <a:lstStyle/>
           <a:p>
-            <a:pPr indent="0" lvl="0" marL="0" rtl="0" algn="l">
-              <a:spcBef>
-                <a:spcPts val="0"/>
-              </a:spcBef>
-              <a:spcAft>
-                <a:spcPts val="0"/>
-              </a:spcAft>
-              <a:buNone/>
-            </a:pPr>
-            <a:r>
-              <a:rPr lang="en-US"/>
-              <a:t>Using `==` is how you end up with bugs that look impossible to reproduce. `===` compares type AND value with no surprises left over, and there's no real disagreement about this anywhere - codebases, linters, style guides all land in the same place. ALWAYS ===. The edge cases at the bottom are the scar-tissue callout: the language literally cannot remove `==` without breaking the web, so the community collectively agrees not to type it. That's a normal pattern in JS-world and it explains a LOT of the style rules students will see in real codebases.</a:t>
-            </a:r>
-            <a:endParaRPr/>
+            <a:r>
+              <a:t>`==` can't be removed without breaking the web, so nobody types it. Linters enforce `===`.</a:t>
+            </a:r>
           </a:p>
         </p:txBody>
       </p:sp>
@@ -3579,20 +3357,9 @@
           </a:bodyPr>
           <a:lstStyle/>
           <a:p>
-            <a:pPr indent="0" lvl="0" marL="0" rtl="0" algn="l">
-              <a:spcBef>
-                <a:spcPts val="0"/>
-              </a:spcBef>
-              <a:spcAft>
-                <a:spcPts val="0"/>
-              </a:spcAft>
-              <a:buNone/>
-            </a:pPr>
-            <a:r>
-              <a:rPr lang="en-US"/>
-              <a:t>The browser hands JS a few things Python never had - types by way of TypeScript, a document you can reach in and mutate, and events to react to. We get through those today. Talking to a server is the one that gets its own lecture next class.</a:t>
-            </a:r>
-            <a:endParaRPr/>
+            <a:r>
+              <a:t>Three browser additions today: types, DOM, events. Talking to a server is next lecture.</a:t>
+            </a:r>
           </a:p>
         </p:txBody>
       </p:sp>
@@ -3730,20 +3497,9 @@
           </a:bodyPr>
           <a:lstStyle/>
           <a:p>
-            <a:pPr indent="0" lvl="0" marL="0" rtl="0" algn="l">
-              <a:spcBef>
-                <a:spcPts val="0"/>
-              </a:spcBef>
-              <a:spcAft>
-                <a:spcPts val="0"/>
-              </a:spcAft>
-              <a:buNone/>
-            </a:pPr>
-            <a:r>
-              <a:rPr lang="en-US"/>
-              <a:t>TypeScript is a COMPILE-TIME layer, so the browser still ends up running plain JavaScript, and all TypeScript is doing is catching your mistakes before you ship them. Same spirit as pytest - find out early instead of late. In real projects you use a bundler (Vite, esbuild) that handles compilation + bundling + hot reloading in one tool - you'll see that in week 6 when we set up React.</a:t>
-            </a:r>
-            <a:endParaRPr/>
+            <a:r>
+              <a:t>Same spirit as pytest: find out early. Bundler (Vite) arrives in week 6 with React.</a:t>
+            </a:r>
           </a:p>
         </p:txBody>
       </p:sp>
@@ -3881,20 +3637,9 @@
           </a:bodyPr>
           <a:lstStyle/>
           <a:p>
-            <a:pPr indent="0" lvl="0" marL="0" rtl="0" algn="l">
-              <a:spcBef>
-                <a:spcPts val="0"/>
-              </a:spcBef>
-              <a:spcAft>
-                <a:spcPts val="0"/>
-              </a:spcAft>
-              <a:buNone/>
-            </a:pPr>
-            <a:r>
-              <a:rPr lang="en-US"/>
-              <a:t>TypeScript is a COMPILE-TIME layer, so the browser still ends up running plain JavaScript, and all TypeScript is doing is catching your mistakes before you ship them. Same spirit as pytest - find out early instead of late. In real projects you use a bundler (Vite, esbuild) that handles compilation + bundling + hot reloading in one tool - you'll see that in week 6 when we set up React.</a:t>
-            </a:r>
-            <a:endParaRPr/>
+            <a:r>
+              <a:t>Same spirit as pytest: find out early. Bundler (Vite) arrives in week 6 with React.</a:t>
+            </a:r>
           </a:p>
         </p:txBody>
       </p:sp>
@@ -4032,20 +3777,9 @@
           </a:bodyPr>
           <a:lstStyle/>
           <a:p>
-            <a:pPr indent="0" lvl="0" marL="0" rtl="0" algn="l">
-              <a:spcBef>
-                <a:spcPts val="0"/>
-              </a:spcBef>
-              <a:spcAft>
-                <a:spcPts val="0"/>
-              </a:spcAft>
-              <a:buNone/>
-            </a:pPr>
-            <a:r>
-              <a:rPr lang="en-US"/>
-              <a:t>TypeScript is a COMPILE-TIME layer, so the browser still ends up running plain JavaScript, and all TypeScript is doing is catching your mistakes before you ship them. Same spirit as pytest - find out early instead of late. In real projects you use a bundler (Vite, esbuild) that handles compilation + bundling + hot reloading in one tool - you'll see that in week 6 when we set up React.</a:t>
-            </a:r>
-            <a:endParaRPr/>
+            <a:r>
+              <a:t>Same spirit as pytest: find out early. Bundler (Vite) arrives in week 6 with React.</a:t>
+            </a:r>
           </a:p>
         </p:txBody>
       </p:sp>
@@ -4183,20 +3917,9 @@
           </a:bodyPr>
           <a:lstStyle/>
           <a:p>
-            <a:pPr indent="0" lvl="0" marL="0" rtl="0" algn="l">
-              <a:spcBef>
-                <a:spcPts val="0"/>
-              </a:spcBef>
-              <a:spcAft>
-                <a:spcPts val="0"/>
-              </a:spcAft>
-              <a:buNone/>
-            </a:pPr>
-            <a:r>
-              <a:rPr lang="en-US"/>
-              <a:t>Set the stakes early. JS is the only programming language that ships in every browser, and that 97% number is worth leaning on - it's the grounding stat for why we're spending a whole lecture on this. Then immediately pivot to the ten-days story...every weird thing they're about to see should make them think 'ten days' and click into place. Also worth saying out loud: JavaScript and Java are unrelated. At least one student will ask about that later if I skip saying it.</a:t>
-            </a:r>
-            <a:endParaRPr/>
+            <a:r>
+              <a:t>Say it: JavaScript and Java are unrelated.</a:t>
+            </a:r>
           </a:p>
         </p:txBody>
       </p:sp>
@@ -4334,20 +4057,9 @@
           </a:bodyPr>
           <a:lstStyle/>
           <a:p>
-            <a:pPr indent="0" lvl="0" marL="0" rtl="0" algn="l">
-              <a:spcBef>
-                <a:spcPts val="0"/>
-              </a:spcBef>
-              <a:spcAft>
-                <a:spcPts val="0"/>
-              </a:spcAft>
-              <a:buNone/>
-            </a:pPr>
-            <a:r>
-              <a:rPr lang="en-US"/>
-              <a:t>Walk through each one. Point out that this IS still JavaScript code, just with extra `: type` annotations - those annotations disappear when tsc compiles the file. The union type `string | null` is TS's way to be explicit about the two-nothings problem from the language tour, worth pointing at.</a:t>
-            </a:r>
-            <a:endParaRPr/>
+            <a:r>
+              <a:t>Annotations vanish at compile. `string | null` makes the two-nothings explicit.</a:t>
+            </a:r>
           </a:p>
         </p:txBody>
       </p:sp>
@@ -4485,20 +4197,9 @@
           </a:bodyPr>
           <a:lstStyle/>
           <a:p>
-            <a:pPr indent="0" lvl="0" marL="0" rtl="0" algn="l">
-              <a:spcBef>
-                <a:spcPts val="0"/>
-              </a:spcBef>
-              <a:spcAft>
-                <a:spcPts val="0"/>
-              </a:spcAft>
-              <a:buNone/>
-            </a:pPr>
-            <a:r>
-              <a:rPr lang="en-US"/>
-              <a:t>Walk through each one. Point out that this IS still JavaScript code, just with extra `: type` annotations - those annotations disappear when tsc compiles the file. The union type `string | null` is TS's way to be explicit about the two-nothings problem from the language tour, worth pointing at.</a:t>
-            </a:r>
-            <a:endParaRPr/>
+            <a:r>
+              <a:t>Annotations vanish at compile. `string | null` makes the two-nothings explicit.</a:t>
+            </a:r>
           </a:p>
         </p:txBody>
       </p:sp>
@@ -4636,20 +4337,9 @@
           </a:bodyPr>
           <a:lstStyle/>
           <a:p>
-            <a:pPr indent="0" lvl="0" marL="0" rtl="0" algn="l">
-              <a:spcBef>
-                <a:spcPts val="0"/>
-              </a:spcBef>
-              <a:spcAft>
-                <a:spcPts val="0"/>
-              </a:spcAft>
-              <a:buNone/>
-            </a:pPr>
-            <a:r>
-              <a:rPr lang="en-US"/>
-              <a:t>Interfaces are TypeScript's equivalent of Pydantic models from 3.2 - they describe the shape an object should have. The optional `?` on priority is the same idea as `Optional[int]` in Python. When tsc sees a shape mismatch it flags it before the code ever runs, which is really the entire reason to bother with any of this.</a:t>
-            </a:r>
-            <a:endParaRPr/>
+            <a:r>
+              <a:t>Interfaces = Pydantic models from 3.2; `?` = `Optional[int]`.</a:t>
+            </a:r>
           </a:p>
         </p:txBody>
       </p:sp>
@@ -4787,20 +4477,9 @@
           </a:bodyPr>
           <a:lstStyle/>
           <a:p>
-            <a:pPr indent="0" lvl="0" marL="0" rtl="0" algn="l">
-              <a:spcBef>
-                <a:spcPts val="0"/>
-              </a:spcBef>
-              <a:spcAft>
-                <a:spcPts val="0"/>
-              </a:spcAft>
-              <a:buNone/>
-            </a:pPr>
-            <a:r>
-              <a:rPr lang="en-US"/>
-              <a:t>They should look at the HTML on the left and the object tree on the right and come away understanding that JS is reaching into that tree and changing it, rather than re-parsing the HTML text every time. Nothing else in the section lands until that shift happens.</a:t>
-            </a:r>
-            <a:endParaRPr/>
+            <a:r>
+              <a:t>JS reaches into the tree and mutates it, no re-parsing HTML text.</a:t>
+            </a:r>
           </a:p>
         </p:txBody>
       </p:sp>
@@ -4938,66 +4617,9 @@
           </a:bodyPr>
           <a:lstStyle/>
           <a:p>
-            <a:pPr indent="0" lvl="0" marL="0" rtl="0" algn="l">
-              <a:spcBef>
-                <a:spcPts val="0"/>
-              </a:spcBef>
-              <a:spcAft>
-                <a:spcPts val="0"/>
-              </a:spcAft>
-              <a:buNone/>
-            </a:pPr>
-            <a:r>
-              <a:rPr lang="en-US"/>
-              <a:t>HTML is the part students have probably already seen but never been formally introduced to. The point to hammer is that the browser turns this text into the object tree from the previous slide - that's the bridge into the rest of the DOM section. The id-vs-class distinction is the one to belabor: id is unique per page and the thing querySelector grabs by `#`, class is the grouping mechanism CSS will hook into and the thing classList.add/toggle flips. If a student has never written HTML, this slide plus the next is enough to read the tiny file we're about to put up.</a:t>
-            </a:r>
-            <a:endParaRPr/>
-          </a:p>
-          <a:p>
-            <a:pPr indent="0" lvl="0" marL="0" rtl="0" algn="l">
-              <a:spcBef>
-                <a:spcPts val="0"/>
-              </a:spcBef>
-              <a:spcAft>
-                <a:spcPts val="0"/>
-              </a:spcAft>
-              <a:buNone/>
-            </a:pPr>
-            <a:r>
-              <a:t/>
-            </a:r>
-            <a:endParaRPr/>
-          </a:p>
-          <a:p>
-            <a:pPr indent="0" lvl="0" marL="0" rtl="0" algn="l">
-              <a:spcBef>
-                <a:spcPts val="0"/>
-              </a:spcBef>
-              <a:spcAft>
-                <a:spcPts val="0"/>
-              </a:spcAft>
-              <a:buNone/>
-            </a:pPr>
-            <a:r>
-              <a:rPr lang="en-US"/>
-              <a:t>Maybe 30 tags in everyday use. Look up the rest when you need them.</a:t>
-            </a:r>
-            <a:endParaRPr/>
-          </a:p>
-          <a:p>
-            <a:pPr indent="0" lvl="0" marL="0" rtl="0" algn="l">
-              <a:spcBef>
-                <a:spcPts val="0"/>
-              </a:spcBef>
-              <a:spcAft>
-                <a:spcPts val="0"/>
-              </a:spcAft>
-              <a:buNone/>
-            </a:pPr>
-            <a:r>
-              <a:t/>
-            </a:r>
-            <a:endParaRPr/>
+            <a:r>
+              <a:t>~30 tags in everyday use, look up the rest. class is what classList flips later.</a:t>
+            </a:r>
           </a:p>
         </p:txBody>
       </p:sp>
@@ -5135,66 +4757,9 @@
           </a:bodyPr>
           <a:lstStyle/>
           <a:p>
-            <a:pPr indent="0" lvl="0" marL="0" rtl="0" algn="l">
-              <a:spcBef>
-                <a:spcPts val="0"/>
-              </a:spcBef>
-              <a:spcAft>
-                <a:spcPts val="0"/>
-              </a:spcAft>
-              <a:buNone/>
-            </a:pPr>
-            <a:r>
-              <a:rPr lang="en-US"/>
-              <a:t>The reason CSS shows up in a JS lecture: classList is one of the most common things you do to the DOM, and classList only makes sense if you know what a class is for. Tie selectors back to querySelector - same `#`, `.`, tag-name syntax, which is not a coincidence, the browser uses one selector engine for both. Don't go deep on the cascade or specificity here - they'll meet that the first time two rules fight, and that's a fine time to learn it.</a:t>
-            </a:r>
-            <a:endParaRPr/>
-          </a:p>
-          <a:p>
-            <a:pPr indent="0" lvl="0" marL="0" rtl="0" algn="l">
-              <a:spcBef>
-                <a:spcPts val="0"/>
-              </a:spcBef>
-              <a:spcAft>
-                <a:spcPts val="0"/>
-              </a:spcAft>
-              <a:buNone/>
-            </a:pPr>
-            <a:r>
-              <a:t/>
-            </a:r>
-            <a:endParaRPr/>
-          </a:p>
-          <a:p>
-            <a:pPr indent="0" lvl="0" marL="0" rtl="0" algn="l">
-              <a:spcBef>
-                <a:spcPts val="0"/>
-              </a:spcBef>
-              <a:spcAft>
-                <a:spcPts val="0"/>
-              </a:spcAft>
-              <a:buNone/>
-            </a:pPr>
-            <a:r>
-              <a:rPr lang="en-US"/>
-              <a:t>Same selector syntax JavaScript's `querySelector` uses:</a:t>
-            </a:r>
-            <a:endParaRPr/>
-          </a:p>
-          <a:p>
-            <a:pPr indent="0" lvl="0" marL="0" rtl="0" algn="l">
-              <a:spcBef>
-                <a:spcPts val="0"/>
-              </a:spcBef>
-              <a:spcAft>
-                <a:spcPts val="0"/>
-              </a:spcAft>
-              <a:buNone/>
-            </a:pPr>
-            <a:r>
-              <a:t/>
-            </a:r>
-            <a:endParaRPr/>
+            <a:r>
+              <a:t>Same selector syntax as querySelector, one engine for both. Skip cascade/specificity.</a:t>
+            </a:r>
           </a:p>
         </p:txBody>
       </p:sp>
@@ -5332,66 +4897,9 @@
           </a:bodyPr>
           <a:lstStyle/>
           <a:p>
-            <a:pPr indent="0" lvl="0" marL="0" rtl="0" algn="l">
-              <a:spcBef>
-                <a:spcPts val="0"/>
-              </a:spcBef>
-              <a:spcAft>
-                <a:spcPts val="0"/>
-              </a:spcAft>
-              <a:buNone/>
-            </a:pPr>
-            <a:r>
-              <a:rPr lang="en-US"/>
-              <a:t>The reason CSS shows up in a JS lecture: classList is one of the most common things you do to the DOM, and classList only makes sense if you know what a class is for. Tie selectors back to querySelector - same `#`, `.`, tag-name syntax, which is not a coincidence, the browser uses one selector engine for both. Don't go deep on the cascade or specificity here - they'll meet that the first time two rules fight, and that's a fine time to learn it.</a:t>
-            </a:r>
-            <a:endParaRPr/>
-          </a:p>
-          <a:p>
-            <a:pPr indent="0" lvl="0" marL="0" rtl="0" algn="l">
-              <a:spcBef>
-                <a:spcPts val="0"/>
-              </a:spcBef>
-              <a:spcAft>
-                <a:spcPts val="0"/>
-              </a:spcAft>
-              <a:buNone/>
-            </a:pPr>
-            <a:r>
-              <a:t/>
-            </a:r>
-            <a:endParaRPr/>
-          </a:p>
-          <a:p>
-            <a:pPr indent="0" lvl="0" marL="0" rtl="0" algn="l">
-              <a:spcBef>
-                <a:spcPts val="0"/>
-              </a:spcBef>
-              <a:spcAft>
-                <a:spcPts val="0"/>
-              </a:spcAft>
-              <a:buNone/>
-            </a:pPr>
-            <a:r>
-              <a:rPr lang="en-US"/>
-              <a:t>Same selector syntax JavaScript's `querySelector` uses:</a:t>
-            </a:r>
-            <a:endParaRPr/>
-          </a:p>
-          <a:p>
-            <a:pPr indent="0" lvl="0" marL="0" rtl="0" algn="l">
-              <a:spcBef>
-                <a:spcPts val="0"/>
-              </a:spcBef>
-              <a:spcAft>
-                <a:spcPts val="0"/>
-              </a:spcAft>
-              <a:buNone/>
-            </a:pPr>
-            <a:r>
-              <a:t/>
-            </a:r>
-            <a:endParaRPr/>
+            <a:r>
+              <a:t>Same selector syntax as querySelector, one engine for both. Skip cascade/specificity.</a:t>
+            </a:r>
           </a:p>
         </p:txBody>
       </p:sp>
@@ -5529,20 +5037,9 @@
           </a:bodyPr>
           <a:lstStyle/>
           <a:p>
-            <a:pPr indent="0" lvl="0" marL="0" rtl="0" algn="l">
-              <a:spcBef>
-                <a:spcPts val="0"/>
-              </a:spcBef>
-              <a:spcAft>
-                <a:spcPts val="0"/>
-              </a:spcAft>
-              <a:buNone/>
-            </a:pPr>
-            <a:r>
-              <a:rPr lang="en-US"/>
-              <a:t>This is the page for the rest of the DOM section - one input, one button, one ul with two items already in it. The &lt;link&gt; tag up in the head pulls in app.css from the next slide, and the &lt;script&gt; tag at the bottom loads our compiled TypeScript, so it's three files, one per language. Keep this slide up on the projector as you walk through the next few - students need to see what the JS is operating on.</a:t>
-            </a:r>
-            <a:endParaRPr/>
+            <a:r>
+              <a:t>Keep this slide up on the projector through the next few.</a:t>
+            </a:r>
           </a:p>
         </p:txBody>
       </p:sp>
@@ -5680,20 +5177,9 @@
           </a:bodyPr>
           <a:lstStyle/>
           <a:p>
-            <a:pPr indent="0" lvl="0" marL="0" rtl="0" algn="l">
-              <a:spcBef>
-                <a:spcPts val="0"/>
-              </a:spcBef>
-              <a:spcAft>
-                <a:spcPts val="0"/>
-              </a:spcAft>
-              <a:buNone/>
-            </a:pPr>
-            <a:r>
-              <a:rPr lang="en-US"/>
-              <a:t>Tiny stylesheet, four rules. The first three are cosmetic - they keep the page from looking like 1996 so students aren't distracted by raw browser defaults. The last rule is the one doing real work - anything with class="done" gets line-throughed. The closing exercise will toggle that class on and off in JS, and the visible behavior comes from this CSS rule. If you want to make the connection extra concrete, open devtools on the live page and edit a class in the elements panel - the line-through appears and disappears as you toggle.</a:t>
-            </a:r>
-            <a:endParaRPr/>
+            <a:r>
+              <a:t>Optional: open devtools on the live page, toggle `done` in the elements panel.</a:t>
+            </a:r>
           </a:p>
         </p:txBody>
       </p:sp>
@@ -5831,20 +5317,9 @@
           </a:bodyPr>
           <a:lstStyle/>
           <a:p>
-            <a:pPr indent="0" lvl="0" marL="0" rtl="0" algn="l">
-              <a:spcBef>
-                <a:spcPts val="0"/>
-              </a:spcBef>
-              <a:spcAft>
-                <a:spcPts val="0"/>
-              </a:spcAft>
-              <a:buNone/>
-            </a:pPr>
-            <a:r>
-              <a:rPr lang="en-US"/>
-              <a:t>querySelector takes a CSS selector, same syntax CSS uses. The `as HTMLInputElement` cast is a TypeScript type assertion - tsc doesn't know what tag the selector will actually match at runtime, so we tell it. Without the cast, TS would treat `input` as the generic `Element` type and we couldn't access .value. Scar tissue from TS meeting the browser, but you get used to it.</a:t>
-            </a:r>
-            <a:endParaRPr/>
+            <a:r>
+              <a:t>`as HTMLInputElement` is a type assertion; without it TS gives `Element`, no `.value`.</a:t>
+            </a:r>
           </a:p>
         </p:txBody>
       </p:sp>
@@ -5982,55 +5457,9 @@
           </a:bodyPr>
           <a:lstStyle/>
           <a:p>
-            <a:pPr indent="0" lvl="0" marL="0" rtl="0" algn="l">
-              <a:spcBef>
-                <a:spcPts val="0"/>
-              </a:spcBef>
-              <a:spcAft>
-                <a:spcPts val="0"/>
-              </a:spcAft>
-              <a:buNone/>
-            </a:pPr>
-            <a:r>
-              <a:rPr lang="en-US"/>
-              <a:t>Every weird thing you’re about to see should make you think 'ten days' and click into place. </a:t>
-            </a:r>
-            <a:r>
-              <a:rPr lang="en-US"/>
-              <a:t>Also: JavaScript and Java are unrelated. At least one student will ask about that later if I skip saying it.</a:t>
-            </a:r>
-            <a:endParaRPr/>
-          </a:p>
-          <a:p>
-            <a:pPr indent="0" lvl="0" marL="0" rtl="0" algn="l">
-              <a:spcBef>
-                <a:spcPts val="0"/>
-              </a:spcBef>
-              <a:spcAft>
-                <a:spcPts val="0"/>
-              </a:spcAft>
-              <a:buNone/>
-            </a:pPr>
-            <a:r>
-              <a:t/>
-            </a:r>
-            <a:endParaRPr/>
-          </a:p>
-          <a:p>
-            <a:pPr indent="0" lvl="0" marL="0" rtl="0" algn="l">
-              <a:spcBef>
-                <a:spcPts val="0"/>
-              </a:spcBef>
-              <a:spcAft>
-                <a:spcPts val="0"/>
-              </a:spcAft>
-              <a:buNone/>
-            </a:pPr>
-            <a:r>
-              <a:rPr lang="en-US"/>
-              <a:t>I keep harping on making good design decisions because you have to live with them. This is the ultimate version of that.</a:t>
-            </a:r>
-            <a:endParaRPr/>
+            <a:r>
+              <a:t>Design decisions you have to live with - this is the extreme case.</a:t>
+            </a:r>
           </a:p>
         </p:txBody>
       </p:sp>
@@ -6168,20 +5597,9 @@
           </a:bodyPr>
           <a:lstStyle/>
           <a:p>
-            <a:pPr indent="0" lvl="0" marL="0" rtl="0" algn="l">
-              <a:spcBef>
-                <a:spcPts val="0"/>
-              </a:spcBef>
-              <a:spcAft>
-                <a:spcPts val="0"/>
-              </a:spcAft>
-              <a:buNone/>
-            </a:pPr>
-            <a:r>
-              <a:rPr lang="en-US"/>
-              <a:t>querySelector takes a CSS selector, same syntax CSS uses. The `as HTMLInputElement` cast is a TypeScript type assertion - tsc doesn't know what tag the selector will actually match at runtime, so we tell it. Without the cast, TS would treat `input` as the generic `Element` type and we couldn't access .value. Scar tissue from TS meeting the browser, but you get used to it.</a:t>
-            </a:r>
-            <a:endParaRPr/>
+            <a:r>
+              <a:t>`as HTMLInputElement` is a type assertion; without it TS gives `Element`, no `.value`.</a:t>
+            </a:r>
           </a:p>
         </p:txBody>
       </p:sp>
@@ -6319,20 +5737,9 @@
           </a:bodyPr>
           <a:lstStyle/>
           <a:p>
-            <a:pPr indent="0" lvl="0" marL="0" rtl="0" algn="l">
-              <a:spcBef>
-                <a:spcPts val="0"/>
-              </a:spcBef>
-              <a:spcAft>
-                <a:spcPts val="0"/>
-              </a:spcAft>
-              <a:buNone/>
-            </a:pPr>
-            <a:r>
-              <a:rPr lang="en-US"/>
-              <a:t>Every property of the DOM object is a setter - assigning to .textContent changes what the user sees immediately. .classList is the cleanest way to toggle CSS classes on and off. createElement + append is the safe way to build DOM nodes. innerHTML is faster to type but becomes an XSS vulnerability the moment user input touches it - the browser will happily execute &lt;script&gt; tags inside strings assigned to innerHTML. Teach textContent and createElement as the default. We come back to the XSS story properly in 9.2.</a:t>
-            </a:r>
-            <a:endParaRPr/>
+            <a:r>
+              <a:t>Default to textContent + createElement. innerHTML runs `&lt;script&gt;` from user input - XSS, see 9.2.</a:t>
+            </a:r>
           </a:p>
         </p:txBody>
       </p:sp>
@@ -6470,20 +5877,9 @@
           </a:bodyPr>
           <a:lstStyle/>
           <a:p>
-            <a:pPr indent="0" lvl="0" marL="0" rtl="0" algn="l">
-              <a:spcBef>
-                <a:spcPts val="0"/>
-              </a:spcBef>
-              <a:spcAft>
-                <a:spcPts val="0"/>
-              </a:spcAft>
-              <a:buNone/>
-            </a:pPr>
-            <a:r>
-              <a:rPr lang="en-US"/>
-              <a:t>Every property of the DOM object is a setter - assigning to .textContent changes what the user sees immediately. .classList is the cleanest way to toggle CSS classes on and off. createElement + append is the safe way to build DOM nodes. innerHTML is faster to type but becomes an XSS vulnerability the moment user input touches it - the browser will happily execute &lt;script&gt; tags inside strings assigned to innerHTML. Teach textContent and createElement as the default. We come back to the XSS story properly in 9.2.</a:t>
-            </a:r>
-            <a:endParaRPr/>
+            <a:r>
+              <a:t>Default to textContent + createElement. innerHTML runs `&lt;script&gt;` from user input - XSS, see 9.2.</a:t>
+            </a:r>
           </a:p>
         </p:txBody>
       </p:sp>
@@ -6621,20 +6017,9 @@
           </a:bodyPr>
           <a:lstStyle/>
           <a:p>
-            <a:pPr indent="0" lvl="0" marL="0" rtl="0" algn="l">
-              <a:spcBef>
-                <a:spcPts val="0"/>
-              </a:spcBef>
-              <a:spcAft>
-                <a:spcPts val="0"/>
-              </a:spcAft>
-              <a:buNone/>
-            </a:pPr>
-            <a:r>
-              <a:rPr lang="en-US"/>
-              <a:t>Every property of the DOM object is a setter - assigning to .textContent changes what the user sees immediately. .classList is the cleanest way to toggle CSS classes on and off. createElement + append is the safe way to build DOM nodes. innerHTML is faster to type but becomes an XSS vulnerability the moment user input touches it - the browser will happily execute &lt;script&gt; tags inside strings assigned to innerHTML. Teach textContent and createElement as the default. We come back to the XSS story properly in 9.2.</a:t>
-            </a:r>
-            <a:endParaRPr/>
+            <a:r>
+              <a:t>Default to textContent + createElement. innerHTML runs `&lt;script&gt;` from user input - XSS, see 9.2.</a:t>
+            </a:r>
           </a:p>
         </p:txBody>
       </p:sp>
@@ -6772,66 +6157,9 @@
           </a:bodyPr>
           <a:lstStyle/>
           <a:p>
-            <a:pPr indent="0" lvl="0" marL="0" rtl="0" algn="l">
-              <a:spcBef>
-                <a:spcPts val="0"/>
-              </a:spcBef>
-              <a:spcAft>
-                <a:spcPts val="0"/>
-              </a:spcAft>
-              <a:buNone/>
-            </a:pPr>
-            <a:r>
-              <a:rPr lang="en-US"/>
-              <a:t>Students coming from Python are used to control flow running top to bottom, and event-driven code doesn't work like that at all - your code runs when something pokes it, so the job becomes registering the right responses ahead of time and then getting out of the way. Pause on the 'and then nothing' line, that surprises students every time.</a:t>
-            </a:r>
-            <a:endParaRPr/>
-          </a:p>
-          <a:p>
-            <a:pPr indent="0" lvl="0" marL="0" rtl="0" algn="l">
-              <a:spcBef>
-                <a:spcPts val="0"/>
-              </a:spcBef>
-              <a:spcAft>
-                <a:spcPts val="0"/>
-              </a:spcAft>
-              <a:buNone/>
-            </a:pPr>
-            <a:r>
-              <a:t/>
-            </a:r>
-            <a:endParaRPr/>
-          </a:p>
-          <a:p>
-            <a:pPr indent="0" lvl="0" marL="0" rtl="0" algn="l">
-              <a:spcBef>
-                <a:spcPts val="0"/>
-              </a:spcBef>
-              <a:spcAft>
-                <a:spcPts val="0"/>
-              </a:spcAft>
-              <a:buNone/>
-            </a:pPr>
-            <a:r>
-              <a:rPr lang="en-US"/>
-              <a:t>The JavaScript isn't "waiting" anywhere. It just stopped running.</a:t>
-            </a:r>
-            <a:endParaRPr/>
-          </a:p>
-          <a:p>
-            <a:pPr indent="0" lvl="0" marL="0" rtl="0" algn="l">
-              <a:spcBef>
-                <a:spcPts val="0"/>
-              </a:spcBef>
-              <a:spcAft>
-                <a:spcPts val="0"/>
-              </a:spcAft>
-              <a:buNone/>
-            </a:pPr>
-            <a:r>
-              <a:t/>
-            </a:r>
-            <a:endParaRPr/>
+            <a:r>
+              <a:t>Pause after 'and then... nothing' before advancing.</a:t>
+            </a:r>
           </a:p>
         </p:txBody>
       </p:sp>
@@ -6969,66 +6297,9 @@
           </a:bodyPr>
           <a:lstStyle/>
           <a:p>
-            <a:pPr indent="0" lvl="0" marL="0" rtl="0" algn="l">
-              <a:spcBef>
-                <a:spcPts val="0"/>
-              </a:spcBef>
-              <a:spcAft>
-                <a:spcPts val="0"/>
-              </a:spcAft>
-              <a:buNone/>
-            </a:pPr>
-            <a:r>
-              <a:rPr lang="en-US"/>
-              <a:t>Students coming from Python are used to control flow running top to bottom, and event-driven code doesn't work like that at all - your code runs when something pokes it, so the job becomes registering the right responses ahead of time and then getting out of the way. Pause on the 'and then nothing' line, that surprises students every time.</a:t>
-            </a:r>
-            <a:endParaRPr/>
-          </a:p>
-          <a:p>
-            <a:pPr indent="0" lvl="0" marL="0" rtl="0" algn="l">
-              <a:spcBef>
-                <a:spcPts val="0"/>
-              </a:spcBef>
-              <a:spcAft>
-                <a:spcPts val="0"/>
-              </a:spcAft>
-              <a:buNone/>
-            </a:pPr>
-            <a:r>
-              <a:t/>
-            </a:r>
-            <a:endParaRPr/>
-          </a:p>
-          <a:p>
-            <a:pPr indent="0" lvl="0" marL="0" rtl="0" algn="l">
-              <a:spcBef>
-                <a:spcPts val="0"/>
-              </a:spcBef>
-              <a:spcAft>
-                <a:spcPts val="0"/>
-              </a:spcAft>
-              <a:buNone/>
-            </a:pPr>
-            <a:r>
-              <a:rPr lang="en-US"/>
-              <a:t>The JavaScript isn't "waiting" anywhere. It just stopped running.</a:t>
-            </a:r>
-            <a:endParaRPr/>
-          </a:p>
-          <a:p>
-            <a:pPr indent="0" lvl="0" marL="0" rtl="0" algn="l">
-              <a:spcBef>
-                <a:spcPts val="0"/>
-              </a:spcBef>
-              <a:spcAft>
-                <a:spcPts val="0"/>
-              </a:spcAft>
-              <a:buNone/>
-            </a:pPr>
-            <a:r>
-              <a:t/>
-            </a:r>
-            <a:endParaRPr/>
+            <a:r>
+              <a:t>Pause after 'and then... nothing' before advancing.</a:t>
+            </a:r>
           </a:p>
         </p:txBody>
       </p:sp>
@@ -7165,22 +6436,7 @@
             <a:noAutofit/>
           </a:bodyPr>
           <a:lstStyle/>
-          <a:p>
-            <a:pPr indent="0" lvl="0" marL="0" rtl="0" algn="l">
-              <a:spcBef>
-                <a:spcPts val="0"/>
-              </a:spcBef>
-              <a:spcAft>
-                <a:spcPts val="0"/>
-              </a:spcAft>
-              <a:buNone/>
-            </a:pPr>
-            <a:r>
-              <a:rPr lang="en-US"/>
-              <a:t>Students coming from Python are used to control flow running top to bottom, and event-driven code doesn't work like that at all - your code runs when something pokes it, so the job becomes registering the right responses ahead of time and then getting out of the way. Pause on the 'and then nothing' line, that surprises students every time.</a:t>
-            </a:r>
-            <a:endParaRPr/>
-          </a:p>
+          <a:p/>
         </p:txBody>
       </p:sp>
       <p:sp>
@@ -7317,20 +6573,9 @@
           </a:bodyPr>
           <a:lstStyle/>
           <a:p>
-            <a:pPr indent="0" lvl="0" marL="0" rtl="0" algn="l">
-              <a:spcBef>
-                <a:spcPts val="0"/>
-              </a:spcBef>
-              <a:spcAft>
-                <a:spcPts val="0"/>
-              </a:spcAft>
-              <a:buNone/>
-            </a:pPr>
-            <a:r>
-              <a:rPr lang="en-US"/>
-              <a:t>addEventListener takes an event name and a function. The click handler combines everything from the DOM section - querySelector, .value, createElement, append, all doing real work together. Walk through the four numbered steps out loud, this is roughly the shape of every event handler students will write for the rest of the semester. preventDefault stops the browser's default behavior, and for forms that's a full-page reload - mention it now so students don't lose an hour to it later when they're building forms.</a:t>
-            </a:r>
-            <a:endParaRPr/>
+            <a:r>
+              <a:t>Walk the four numbered steps aloud. Mention preventDefault now, before they build forms.</a:t>
+            </a:r>
           </a:p>
         </p:txBody>
       </p:sp>
@@ -7468,20 +6713,9 @@
           </a:bodyPr>
           <a:lstStyle/>
           <a:p>
-            <a:pPr indent="0" lvl="0" marL="0" rtl="0" algn="l">
-              <a:spcBef>
-                <a:spcPts val="0"/>
-              </a:spcBef>
-              <a:spcAft>
-                <a:spcPts val="0"/>
-              </a:spcAft>
-              <a:buNone/>
-            </a:pPr>
-            <a:r>
-              <a:rPr lang="en-US"/>
-              <a:t>Each blank is one concept. querySelectorAll returns a NodeList of matches, forEach iterates over it, addEventListener registers the click handler, classList.toggle flips the class. This exercise ties together DOM selection, iteration, events, and class manipulation in about ten lines, which is kinda the whole browser half of the day in miniature.</a:t>
-            </a:r>
-            <a:endParaRPr/>
+            <a:r>
+              <a:t>Blanks: querySelectorAll, forEach, addEventListener, classList, toggle, done.</a:t>
+            </a:r>
           </a:p>
         </p:txBody>
       </p:sp>
@@ -7619,241 +6853,9 @@
           </a:bodyPr>
           <a:lstStyle/>
           <a:p>
-            <a:pPr indent="0" lvl="0" marL="0" rtl="0" algn="l">
-              <a:spcBef>
-                <a:spcPts val="0"/>
-              </a:spcBef>
-              <a:spcAft>
-                <a:spcPts val="0"/>
-              </a:spcAft>
-              <a:buNone/>
-            </a:pPr>
-            <a:r>
-              <a:rPr lang="en-US"/>
-              <a:t>Walk through each answer. Then use the speaker notes to introduce event delegation as a forward-looking idea - if you add todos dynamically (the way the previous worked example does), per-item listeners don't get attached to the new ones, which is a bug students will hit. Event delegation is the cleaner fix. Don't teach it in full, just plant the name so they know to look it up when the bug bites.</a:t>
-            </a:r>
-            <a:endParaRPr/>
-          </a:p>
-          <a:p>
-            <a:pPr indent="0" lvl="0" marL="0" rtl="0" algn="l">
-              <a:spcBef>
-                <a:spcPts val="0"/>
-              </a:spcBef>
-              <a:spcAft>
-                <a:spcPts val="0"/>
-              </a:spcAft>
-              <a:buNone/>
-            </a:pPr>
-            <a:r>
-              <a:t/>
-            </a:r>
-            <a:endParaRPr/>
-          </a:p>
-          <a:p>
-            <a:pPr indent="0" lvl="0" marL="0" rtl="0" algn="l">
-              <a:spcBef>
-                <a:spcPts val="0"/>
-              </a:spcBef>
-              <a:spcAft>
-                <a:spcPts val="0"/>
-              </a:spcAft>
-              <a:buNone/>
-            </a:pPr>
-            <a:r>
-              <a:rPr lang="en-US"/>
-              <a:t>items.forEach((li) =&gt; {</a:t>
-            </a:r>
-            <a:endParaRPr/>
-          </a:p>
-          <a:p>
-            <a:pPr indent="0" lvl="0" marL="0" rtl="0" algn="l">
-              <a:spcBef>
-                <a:spcPts val="0"/>
-              </a:spcBef>
-              <a:spcAft>
-                <a:spcPts val="0"/>
-              </a:spcAft>
-              <a:buNone/>
-            </a:pPr>
-            <a:r>
-              <a:rPr lang="en-US"/>
-              <a:t>    li.addEventListener("click", () =&gt; {</a:t>
-            </a:r>
-            <a:endParaRPr/>
-          </a:p>
-          <a:p>
-            <a:pPr indent="0" lvl="0" marL="0" rtl="0" algn="l">
-              <a:spcBef>
-                <a:spcPts val="0"/>
-              </a:spcBef>
-              <a:spcAft>
-                <a:spcPts val="0"/>
-              </a:spcAft>
-              <a:buNone/>
-            </a:pPr>
-            <a:r>
-              <a:rPr lang="en-US"/>
-              <a:t>        li.classList.toggle("done");</a:t>
-            </a:r>
-            <a:endParaRPr/>
-          </a:p>
-          <a:p>
-            <a:pPr indent="0" lvl="0" marL="0" rtl="0" algn="l">
-              <a:spcBef>
-                <a:spcPts val="0"/>
-              </a:spcBef>
-              <a:spcAft>
-                <a:spcPts val="0"/>
-              </a:spcAft>
-              <a:buNone/>
-            </a:pPr>
-            <a:r>
-              <a:rPr lang="en-US"/>
-              <a:t>    });</a:t>
-            </a:r>
-            <a:endParaRPr/>
-          </a:p>
-          <a:p>
-            <a:pPr indent="0" lvl="0" marL="0" rtl="0" algn="l">
-              <a:spcBef>
-                <a:spcPts val="0"/>
-              </a:spcBef>
-              <a:spcAft>
-                <a:spcPts val="0"/>
-              </a:spcAft>
-              <a:buNone/>
-            </a:pPr>
-            <a:r>
-              <a:rPr lang="en-US"/>
-              <a:t>});</a:t>
-            </a:r>
-            <a:endParaRPr/>
-          </a:p>
-          <a:p>
-            <a:pPr indent="0" lvl="0" marL="0" rtl="0" algn="l">
-              <a:spcBef>
-                <a:spcPts val="0"/>
-              </a:spcBef>
-              <a:spcAft>
-                <a:spcPts val="0"/>
-              </a:spcAft>
-              <a:buNone/>
-            </a:pPr>
-            <a:r>
-              <a:t/>
-            </a:r>
-            <a:endParaRPr/>
-          </a:p>
-          <a:p>
-            <a:pPr indent="0" lvl="0" marL="0" rtl="0" algn="l">
-              <a:spcBef>
-                <a:spcPts val="0"/>
-              </a:spcBef>
-              <a:spcAft>
-                <a:spcPts val="0"/>
-              </a:spcAft>
-              <a:buNone/>
-            </a:pPr>
-            <a:r>
-              <a:rPr lang="en-US"/>
-              <a:t>// Why a listener on each &lt;li&gt;?</a:t>
-            </a:r>
-            <a:endParaRPr/>
-          </a:p>
-          <a:p>
-            <a:pPr indent="0" lvl="0" marL="0" rtl="0" algn="l">
-              <a:spcBef>
-                <a:spcPts val="0"/>
-              </a:spcBef>
-              <a:spcAft>
-                <a:spcPts val="0"/>
-              </a:spcAft>
-              <a:buNone/>
-            </a:pPr>
-            <a:r>
-              <a:rPr lang="en-US"/>
-              <a:t>//   Because we want each to respond independently to its own click.</a:t>
-            </a:r>
-            <a:endParaRPr/>
-          </a:p>
-          <a:p>
-            <a:pPr indent="0" lvl="0" marL="0" rtl="0" algn="l">
-              <a:spcBef>
-                <a:spcPts val="0"/>
-              </a:spcBef>
-              <a:spcAft>
-                <a:spcPts val="0"/>
-              </a:spcAft>
-              <a:buNone/>
-            </a:pPr>
-            <a:r>
-              <a:rPr lang="en-US"/>
-              <a:t>//   We could attach one listener to the &lt;ul&gt; instead and check</a:t>
-            </a:r>
-            <a:endParaRPr/>
-          </a:p>
-          <a:p>
-            <a:pPr indent="0" lvl="0" marL="0" rtl="0" algn="l">
-              <a:spcBef>
-                <a:spcPts val="0"/>
-              </a:spcBef>
-              <a:spcAft>
-                <a:spcPts val="0"/>
-              </a:spcAft>
-              <a:buNone/>
-            </a:pPr>
-            <a:r>
-              <a:rPr lang="en-US"/>
-              <a:t>//   event.target to see which &lt;li&gt; was clicked - that's a pattern</a:t>
-            </a:r>
-            <a:endParaRPr/>
-          </a:p>
-          <a:p>
-            <a:pPr indent="0" lvl="0" marL="0" rtl="0" algn="l">
-              <a:spcBef>
-                <a:spcPts val="0"/>
-              </a:spcBef>
-              <a:spcAft>
-                <a:spcPts val="0"/>
-              </a:spcAft>
-              <a:buNone/>
-            </a:pPr>
-            <a:r>
-              <a:rPr lang="en-US"/>
-              <a:t>//   called "event delegation," and it matters when items are added</a:t>
-            </a:r>
-            <a:endParaRPr/>
-          </a:p>
-          <a:p>
-            <a:pPr indent="0" lvl="0" marL="0" rtl="0" algn="l">
-              <a:spcBef>
-                <a:spcPts val="0"/>
-              </a:spcBef>
-              <a:spcAft>
-                <a:spcPts val="0"/>
-              </a:spcAft>
-              <a:buNone/>
-            </a:pPr>
-            <a:r>
-              <a:rPr lang="en-US"/>
-              <a:t>//   and removed dynamically. For a fixed list, per-item is fine.</a:t>
-            </a:r>
-            <a:endParaRPr/>
-          </a:p>
-          <a:p>
-            <a:pPr indent="0" lvl="0" marL="0" rtl="0" algn="l">
-              <a:spcBef>
-                <a:spcPts val="0"/>
-              </a:spcBef>
-              <a:spcAft>
-                <a:spcPts val="0"/>
-              </a:spcAft>
-              <a:buNone/>
-            </a:pPr>
-            <a:r>
-              <a:t/>
-            </a:r>
-            <a:endParaRPr/>
+            <a:r>
+              <a:t>Don't teach delegation, just name it. Todos added via slide 46 get no listener.</a:t>
+            </a:r>
           </a:p>
         </p:txBody>
       </p:sp>
@@ -7991,20 +6993,9 @@
           </a:bodyPr>
           <a:lstStyle/>
           <a:p>
-            <a:pPr indent="0" lvl="0" marL="0" rtl="0" algn="l">
-              <a:spcBef>
-                <a:spcPts val="0"/>
-              </a:spcBef>
-              <a:spcAft>
-                <a:spcPts val="0"/>
-              </a:spcAft>
-              <a:buNone/>
-            </a:pPr>
-            <a:r>
-              <a:rPr lang="en-US"/>
-              <a:t>Read each one out loud and slow. Students should really feel the pressure of ten days stacked on top of all those requirements at once. The next slide asks them to BE Eich for four minutes so don't spoil the answers here.</a:t>
-            </a:r>
-            <a:endParaRPr/>
+            <a:r>
+              <a:t>Read each constraint slowly. Don't spoil the next slide's answers.</a:t>
+            </a:r>
           </a:p>
         </p:txBody>
       </p:sp>
@@ -8142,20 +7133,9 @@
           </a:bodyPr>
           <a:lstStyle/>
           <a:p>
-            <a:pPr indent="0" lvl="0" marL="0" rtl="0" algn="l">
-              <a:spcBef>
-                <a:spcPts val="0"/>
-              </a:spcBef>
-              <a:spcAft>
-                <a:spcPts val="0"/>
-              </a:spcAft>
-              <a:buNone/>
-            </a:pPr>
-            <a:r>
-              <a:rPr lang="en-US"/>
-              <a:t>Forward reference to 5.2 explicitly flags that fetch is the third capability and brings async with it. Students should leave today knowing that next class is about WAITING, not about a new piece of syntax. That framing sets up the promises material really well. The rules of the road in the middle are the practical takeaways - feel free to repeat them at the top of 5.2 if it helps.</a:t>
-            </a:r>
-            <a:endParaRPr/>
+            <a:r>
+              <a:t>Frame 5.2 as waiting. Repeat the rules list at the top of 5.2.</a:t>
+            </a:r>
           </a:p>
         </p:txBody>
       </p:sp>
@@ -8293,20 +7273,9 @@
           </a:bodyPr>
           <a:lstStyle/>
           <a:p>
-            <a:pPr indent="0" lvl="0" marL="0" rtl="0" algn="l">
-              <a:spcBef>
-                <a:spcPts val="0"/>
-              </a:spcBef>
-              <a:spcAft>
-                <a:spcPts val="0"/>
-              </a:spcAft>
-              <a:buNone/>
-            </a:pPr>
-            <a:r>
-              <a:rPr lang="en-US"/>
-              <a:t>Read each one out loud and slow. Students should really feel the pressure of ten days stacked on top of all those requirements at once. The next slide asks them to BE Eich for four minutes so don't spoil the answers here.</a:t>
-            </a:r>
-            <a:endParaRPr/>
+            <a:r>
+              <a:t>Read each constraint slowly. Don't spoil the next slide's answers.</a:t>
+            </a:r>
           </a:p>
         </p:txBody>
       </p:sp>
@@ -8444,20 +7413,9 @@
           </a:bodyPr>
           <a:lstStyle/>
           <a:p>
-            <a:pPr indent="0" lvl="0" marL="0" rtl="0" algn="l">
-              <a:spcBef>
-                <a:spcPts val="0"/>
-              </a:spcBef>
-              <a:spcAft>
-                <a:spcPts val="0"/>
-              </a:spcAft>
-              <a:buNone/>
-            </a:pPr>
-            <a:r>
-              <a:rPr lang="en-US"/>
-              <a:t>Read each one out loud and slow. Students should really feel the pressure of ten days stacked on top of all those requirements at once. The next slide asks them to BE Eich for four minutes so don't spoil the answers here.</a:t>
-            </a:r>
-            <a:endParaRPr/>
+            <a:r>
+              <a:t>Read each constraint slowly. Don't spoil the next slide's answers.</a:t>
+            </a:r>
           </a:p>
         </p:txBody>
       </p:sp>
@@ -8595,20 +7553,9 @@
           </a:bodyPr>
           <a:lstStyle/>
           <a:p>
-            <a:pPr indent="0" lvl="0" marL="0" rtl="0" algn="l">
-              <a:spcBef>
-                <a:spcPts val="0"/>
-              </a:spcBef>
-              <a:spcAft>
-                <a:spcPts val="0"/>
-              </a:spcAft>
-              <a:buNone/>
-            </a:pPr>
-            <a:r>
-              <a:rPr lang="en-US"/>
-              <a:t>Read each one out loud and slow. Students should really feel the pressure of ten days stacked on top of all those requirements at once. The next slide asks them to BE Eich for four minutes so don't spoil the answers here.</a:t>
-            </a:r>
-            <a:endParaRPr/>
+            <a:r>
+              <a:t>Read each constraint slowly. Don't spoil the next slide's answers.</a:t>
+            </a:r>
           </a:p>
         </p:txBody>
       </p:sp>
@@ -8746,20 +7693,9 @@
           </a:bodyPr>
           <a:lstStyle/>
           <a:p>
-            <a:pPr indent="0" lvl="0" marL="0" rtl="0" algn="l">
-              <a:spcBef>
-                <a:spcPts val="0"/>
-              </a:spcBef>
-              <a:spcAft>
-                <a:spcPts val="0"/>
-              </a:spcAft>
-              <a:buNone/>
-            </a:pPr>
-            <a:r>
-              <a:rPr lang="en-US"/>
-              <a:t>Read each one out loud and slow. Students should really feel the pressure of ten days stacked on top of all those requirements at once. The next slide asks them to BE Eich for four minutes so don't spoil the answers here.</a:t>
-            </a:r>
-            <a:endParaRPr/>
+            <a:r>
+              <a:t>Read each constraint slowly. Don't spoil the next slide's answers.</a:t>
+            </a:r>
           </a:p>
         </p:txBody>
       </p:sp>
